--- a/Лекция_4доп_Генерация_зелёного_излучения.pptx
+++ b/Лекция_4доп_Генерация_зелёного_излучения.pptx
@@ -3966,7 +3966,7 @@
       </p:graphicFrame>
       <p:pic>
         <p:nvPicPr>
-          <p:cNvPr id="6" name="Picture 5" descr="pic_2958.png"/>
+          <p:cNvPr id="6" name="Picture 5" descr="pic_87970.png"/>
           <p:cNvPicPr>
             <a:picLocks noChangeAspect="1"/>
           </p:cNvPicPr>
@@ -3981,7 +3981,7 @@
         <p:spPr>
           <a:xfrm>
             <a:off x="6309360" y="1371600"/>
-            <a:ext cx="5669280" cy="3607724"/>
+            <a:ext cx="5623560" cy="3578629"/>
           </a:xfrm>
           <a:prstGeom prst="rect">
             <a:avLst/>
@@ -4231,7 +4231,7 @@
       </p:sp>
       <p:pic>
         <p:nvPicPr>
-          <p:cNvPr id="5" name="Picture 4" descr="pic_81031.png"/>
+          <p:cNvPr id="5" name="Picture 4" descr="pic_64019.png"/>
           <p:cNvPicPr>
             <a:picLocks noChangeAspect="1"/>
           </p:cNvPicPr>
@@ -4255,7 +4255,7 @@
       </p:pic>
       <p:pic>
         <p:nvPicPr>
-          <p:cNvPr id="6" name="Picture 5" descr="pic_63481.png"/>
+          <p:cNvPr id="6" name="Picture 5" descr="pic_36675.png"/>
           <p:cNvPicPr>
             <a:picLocks noChangeAspect="1"/>
           </p:cNvPicPr>
@@ -4270,7 +4270,7 @@
         <p:spPr>
           <a:xfrm>
             <a:off x="6126480" y="1371600"/>
-            <a:ext cx="5669280" cy="3607724"/>
+            <a:ext cx="5669280" cy="3607723"/>
           </a:xfrm>
           <a:prstGeom prst="rect">
             <a:avLst/>
@@ -5924,7 +5924,7 @@
       </p:graphicFrame>
       <p:pic>
         <p:nvPicPr>
-          <p:cNvPr id="6" name="Picture 5" descr="pic_46629.png"/>
+          <p:cNvPr id="6" name="Picture 5" descr="pic_60409.png"/>
           <p:cNvPicPr>
             <a:picLocks noChangeAspect="1"/>
           </p:cNvPicPr>
@@ -5938,8 +5938,8 @@
         </p:blipFill>
         <p:spPr>
           <a:xfrm>
-            <a:off x="5715000" y="3703320"/>
-            <a:ext cx="6263640" cy="3701242"/>
+            <a:off x="5715000" y="3611880"/>
+            <a:ext cx="5152995" cy="3044952"/>
           </a:xfrm>
           <a:prstGeom prst="rect">
             <a:avLst/>
@@ -6058,8 +6058,8 @@
         </p:nvSpPr>
         <p:spPr>
           <a:xfrm>
-            <a:off x="457200" y="1298448"/>
-            <a:ext cx="4206240" cy="5120640"/>
+            <a:off x="411480" y="1261872"/>
+            <a:ext cx="4297680" cy="2788920"/>
           </a:xfrm>
           <a:prstGeom prst="rect">
             <a:avLst/>
@@ -6074,7 +6074,7 @@
           <a:p>
             <a:pPr>
               <a:spcAft>
-                <a:spcPts val="900"/>
+                <a:spcPts val="600"/>
               </a:spcAft>
             </a:pPr>
             <a:r>
@@ -6090,7 +6090,7 @@
           <a:p>
             <a:pPr>
               <a:spcAft>
-                <a:spcPts val="900"/>
+                <a:spcPts val="600"/>
               </a:spcAft>
             </a:pPr>
             <a:r>
@@ -6106,7 +6106,7 @@
           <a:p>
             <a:pPr>
               <a:spcAft>
-                <a:spcPts val="900"/>
+                <a:spcPts val="600"/>
               </a:spcAft>
             </a:pPr>
             <a:r>
@@ -6122,7 +6122,7 @@
           <a:p>
             <a:pPr>
               <a:spcAft>
-                <a:spcPts val="900"/>
+                <a:spcPts val="600"/>
               </a:spcAft>
             </a:pPr>
             <a:r>
@@ -6138,7 +6138,7 @@
           <a:p>
             <a:pPr>
               <a:spcAft>
-                <a:spcPts val="900"/>
+                <a:spcPts val="600"/>
               </a:spcAft>
             </a:pPr>
             <a:r>
@@ -6190,7 +6190,7 @@
           <a:p>
             <a:pPr>
               <a:spcAft>
-                <a:spcPts val="900"/>
+                <a:spcPts val="600"/>
               </a:spcAft>
             </a:pPr>
             <a:r>
@@ -6206,7 +6206,7 @@
           <a:p>
             <a:pPr>
               <a:spcAft>
-                <a:spcPts val="900"/>
+                <a:spcPts val="600"/>
               </a:spcAft>
             </a:pPr>
             <a:r>
@@ -6223,7 +6223,7 @@
       </p:sp>
       <p:pic>
         <p:nvPicPr>
-          <p:cNvPr id="5" name="Picture 4" descr="pic_77049.png"/>
+          <p:cNvPr id="5" name="Picture 4" descr="pic_85212.png"/>
           <p:cNvPicPr>
             <a:picLocks noChangeAspect="1"/>
           </p:cNvPicPr>
@@ -6237,8 +6237,8 @@
         </p:blipFill>
         <p:spPr>
           <a:xfrm>
-            <a:off x="457200" y="4709160"/>
-            <a:ext cx="4206240" cy="3154680"/>
+            <a:off x="411480" y="4041648"/>
+            <a:ext cx="4125360" cy="2615184"/>
           </a:xfrm>
           <a:prstGeom prst="rect">
             <a:avLst/>
@@ -6247,7 +6247,7 @@
       </p:pic>
       <p:pic>
         <p:nvPicPr>
-          <p:cNvPr id="6" name="Picture 5" descr="pic_58120.png"/>
+          <p:cNvPr id="6" name="Picture 5" descr="pic_76949.png"/>
           <p:cNvPicPr>
             <a:picLocks noChangeAspect="1"/>
           </p:cNvPicPr>
@@ -6261,8 +6261,8 @@
         </p:blipFill>
         <p:spPr>
           <a:xfrm>
-            <a:off x="4892040" y="1280160"/>
-            <a:ext cx="7086600" cy="4409440"/>
+            <a:off x="4828032" y="1243584"/>
+            <a:ext cx="6080760" cy="3783584"/>
           </a:xfrm>
           <a:prstGeom prst="rect">
             <a:avLst/>
@@ -6271,7 +6271,7 @@
       </p:pic>
       <p:pic>
         <p:nvPicPr>
-          <p:cNvPr id="7" name="Picture 6" descr="pic_35819.png"/>
+          <p:cNvPr id="7" name="Picture 6" descr="pic_84606.png"/>
           <p:cNvPicPr>
             <a:picLocks noChangeAspect="1"/>
           </p:cNvPicPr>
@@ -6285,8 +6285,8 @@
         </p:blipFill>
         <p:spPr>
           <a:xfrm>
-            <a:off x="5029200" y="5120640"/>
-            <a:ext cx="6766560" cy="2517790"/>
+            <a:off x="4828032" y="5138928"/>
+            <a:ext cx="6995160" cy="1437894"/>
           </a:xfrm>
           <a:prstGeom prst="rect">
             <a:avLst/>
@@ -6405,8 +6405,8 @@
         </p:nvSpPr>
         <p:spPr>
           <a:xfrm>
-            <a:off x="822960" y="1417320"/>
-            <a:ext cx="10515600" cy="5120640"/>
+            <a:off x="640080" y="1325880"/>
+            <a:ext cx="10881360" cy="2331720"/>
           </a:xfrm>
           <a:prstGeom prst="rect">
             <a:avLst/>
@@ -6421,11 +6421,11 @@
           <a:p>
             <a:pPr>
               <a:spcAft>
-                <a:spcPts val="1400"/>
+                <a:spcPts val="800"/>
               </a:spcAft>
             </a:pPr>
             <a:r>
-              <a:rPr sz="1600" b="0">
+              <a:rPr sz="1500" b="0">
                 <a:solidFill>
                   <a:srgbClr val="EEEEEE"/>
                 </a:solidFill>
@@ -6437,11 +6437,11 @@
           <a:p>
             <a:pPr>
               <a:spcAft>
-                <a:spcPts val="1400"/>
+                <a:spcPts val="800"/>
               </a:spcAft>
             </a:pPr>
             <a:r>
-              <a:rPr sz="1600" b="0">
+              <a:rPr sz="1500" b="0">
                 <a:solidFill>
                   <a:srgbClr val="EEEEEE"/>
                 </a:solidFill>
@@ -6453,11 +6453,11 @@
           <a:p>
             <a:pPr>
               <a:spcAft>
-                <a:spcPts val="1400"/>
+                <a:spcPts val="800"/>
               </a:spcAft>
             </a:pPr>
             <a:r>
-              <a:rPr sz="1600" b="0">
+              <a:rPr sz="1500" b="0">
                 <a:solidFill>
                   <a:srgbClr val="EEEEEE"/>
                 </a:solidFill>
@@ -6469,11 +6469,11 @@
           <a:p>
             <a:pPr>
               <a:spcAft>
-                <a:spcPts val="1400"/>
+                <a:spcPts val="800"/>
               </a:spcAft>
             </a:pPr>
             <a:r>
-              <a:rPr sz="1600" b="0">
+              <a:rPr sz="1500" b="0">
                 <a:solidFill>
                   <a:srgbClr val="EEEEEE"/>
                 </a:solidFill>
@@ -6485,11 +6485,11 @@
           <a:p>
             <a:pPr>
               <a:spcAft>
-                <a:spcPts val="1400"/>
+                <a:spcPts val="800"/>
               </a:spcAft>
             </a:pPr>
             <a:r>
-              <a:rPr sz="1600" b="0">
+              <a:rPr sz="1500" b="0">
                 <a:solidFill>
                   <a:srgbClr val="EEEEEE"/>
                 </a:solidFill>
@@ -6502,7 +6502,7 @@
       </p:sp>
       <p:pic>
         <p:nvPicPr>
-          <p:cNvPr id="5" name="Picture 4" descr="pic_28963.png"/>
+          <p:cNvPr id="5" name="Picture 4" descr="pic_60368.png"/>
           <p:cNvPicPr>
             <a:picLocks noChangeAspect="1"/>
           </p:cNvPicPr>
@@ -6516,8 +6516,8 @@
         </p:blipFill>
         <p:spPr>
           <a:xfrm>
-            <a:off x="3017520" y="4572000"/>
-            <a:ext cx="6126480" cy="3063240"/>
+            <a:off x="3063240" y="3703320"/>
+            <a:ext cx="5907024" cy="2953512"/>
           </a:xfrm>
           <a:prstGeom prst="rect">
             <a:avLst/>

--- a/Лекция_4доп_Генерация_зелёного_излучения.pptx
+++ b/Лекция_4доп_Генерация_зелёного_излучения.pptx
@@ -3966,7 +3966,7 @@
       </p:graphicFrame>
       <p:pic>
         <p:nvPicPr>
-          <p:cNvPr id="6" name="Picture 5" descr="pic_87970.png"/>
+          <p:cNvPr id="6" name="Picture 5" descr="pic_64779.png"/>
           <p:cNvPicPr>
             <a:picLocks noChangeAspect="1"/>
           </p:cNvPicPr>
@@ -4231,7 +4231,7 @@
       </p:sp>
       <p:pic>
         <p:nvPicPr>
-          <p:cNvPr id="5" name="Picture 4" descr="pic_64019.png"/>
+          <p:cNvPr id="5" name="Picture 4" descr="pic_69608.png"/>
           <p:cNvPicPr>
             <a:picLocks noChangeAspect="1"/>
           </p:cNvPicPr>
@@ -4255,7 +4255,7 @@
       </p:pic>
       <p:pic>
         <p:nvPicPr>
-          <p:cNvPr id="6" name="Picture 5" descr="pic_36675.png"/>
+          <p:cNvPr id="6" name="Picture 5" descr="pic_49050.png"/>
           <p:cNvPicPr>
             <a:picLocks noChangeAspect="1"/>
           </p:cNvPicPr>
@@ -5477,7 +5477,7 @@
                           </a:solidFill>
                           <a:latin typeface="Calibri"/>
                         </a:rPr>
-                        <a:t> Ф/м</a:t>
+                        <a:t> Ф/м; Ф (фарад) = Кл/В</a:t>
                       </a:r>
                     </a:p>
                   </a:txBody>
@@ -5924,7 +5924,7 @@
       </p:graphicFrame>
       <p:pic>
         <p:nvPicPr>
-          <p:cNvPr id="6" name="Picture 5" descr="pic_60409.png"/>
+          <p:cNvPr id="6" name="Picture 5" descr="pic_87840.png"/>
           <p:cNvPicPr>
             <a:picLocks noChangeAspect="1"/>
           </p:cNvPicPr>
@@ -6223,7 +6223,7 @@
       </p:sp>
       <p:pic>
         <p:nvPicPr>
-          <p:cNvPr id="5" name="Picture 4" descr="pic_85212.png"/>
+          <p:cNvPr id="5" name="Picture 4" descr="pic_4666.png"/>
           <p:cNvPicPr>
             <a:picLocks noChangeAspect="1"/>
           </p:cNvPicPr>
@@ -6247,7 +6247,7 @@
       </p:pic>
       <p:pic>
         <p:nvPicPr>
-          <p:cNvPr id="6" name="Picture 5" descr="pic_76949.png"/>
+          <p:cNvPr id="6" name="Picture 5" descr="pic_7606.png"/>
           <p:cNvPicPr>
             <a:picLocks noChangeAspect="1"/>
           </p:cNvPicPr>
@@ -6271,7 +6271,7 @@
       </p:pic>
       <p:pic>
         <p:nvPicPr>
-          <p:cNvPr id="7" name="Picture 6" descr="pic_84606.png"/>
+          <p:cNvPr id="7" name="Picture 6" descr="pic_75123.png"/>
           <p:cNvPicPr>
             <a:picLocks noChangeAspect="1"/>
           </p:cNvPicPr>
@@ -6502,7 +6502,7 @@
       </p:sp>
       <p:pic>
         <p:nvPicPr>
-          <p:cNvPr id="5" name="Picture 4" descr="pic_60368.png"/>
+          <p:cNvPr id="5" name="Picture 4" descr="pic_95388.png"/>
           <p:cNvPicPr>
             <a:picLocks noChangeAspect="1"/>
           </p:cNvPicPr>

--- a/Лекция_4доп_Генерация_зелёного_излучения.pptx
+++ b/Лекция_4доп_Генерация_зелёного_излучения.pptx
@@ -3448,7 +3448,7 @@
                 </a:solidFill>
                 <a:latin typeface="Calibri"/>
               </a:rPr>
-              <a:t>3. Прямая генерация: «зелёная щель» InGaN</a:t>
+              <a:t>3. Прямая генерация: проблема зелёного диапазона InGaN</a:t>
             </a:r>
           </a:p>
           <a:p>
@@ -3966,7 +3966,7 @@
       </p:graphicFrame>
       <p:pic>
         <p:nvPicPr>
-          <p:cNvPr id="6" name="Picture 5" descr="pic_64779.png"/>
+          <p:cNvPr id="6" name="Picture 5" descr="pic_89419.png"/>
           <p:cNvPicPr>
             <a:picLocks noChangeAspect="1"/>
           </p:cNvPicPr>
@@ -4126,7 +4126,7 @@
                 </a:solidFill>
                 <a:latin typeface="Calibri"/>
               </a:rPr>
-              <a:t>InGaN-диоды существуют — но упираются в «зелёную щель» (green gap)</a:t>
+              <a:t>InGaN-диоды существуют — но упираются в проблему зелёного диапазона (green gap)</a:t>
             </a:r>
           </a:p>
           <a:p>
@@ -4231,7 +4231,7 @@
       </p:sp>
       <p:pic>
         <p:nvPicPr>
-          <p:cNvPr id="5" name="Picture 4" descr="pic_69608.png"/>
+          <p:cNvPr id="5" name="Picture 4" descr="pic_36289.png"/>
           <p:cNvPicPr>
             <a:picLocks noChangeAspect="1"/>
           </p:cNvPicPr>
@@ -4255,7 +4255,7 @@
       </p:pic>
       <p:pic>
         <p:nvPicPr>
-          <p:cNvPr id="6" name="Picture 5" descr="pic_49050.png"/>
+          <p:cNvPr id="6" name="Picture 5" descr="pic_24718.png"/>
           <p:cNvPicPr>
             <a:picLocks noChangeAspect="1"/>
           </p:cNvPicPr>
@@ -5924,7 +5924,7 @@
       </p:graphicFrame>
       <p:pic>
         <p:nvPicPr>
-          <p:cNvPr id="6" name="Picture 5" descr="pic_87840.png"/>
+          <p:cNvPr id="6" name="Picture 5" descr="pic_93475.png"/>
           <p:cNvPicPr>
             <a:picLocks noChangeAspect="1"/>
           </p:cNvPicPr>
@@ -6223,7 +6223,7 @@
       </p:sp>
       <p:pic>
         <p:nvPicPr>
-          <p:cNvPr id="5" name="Picture 4" descr="pic_4666.png"/>
+          <p:cNvPr id="5" name="Picture 4" descr="pic_55163.png"/>
           <p:cNvPicPr>
             <a:picLocks noChangeAspect="1"/>
           </p:cNvPicPr>
@@ -6247,7 +6247,7 @@
       </p:pic>
       <p:pic>
         <p:nvPicPr>
-          <p:cNvPr id="6" name="Picture 5" descr="pic_7606.png"/>
+          <p:cNvPr id="6" name="Picture 5" descr="pic_61940.png"/>
           <p:cNvPicPr>
             <a:picLocks noChangeAspect="1"/>
           </p:cNvPicPr>
@@ -6271,7 +6271,7 @@
       </p:pic>
       <p:pic>
         <p:nvPicPr>
-          <p:cNvPr id="7" name="Picture 6" descr="pic_75123.png"/>
+          <p:cNvPr id="7" name="Picture 6" descr="pic_20789.png"/>
           <p:cNvPicPr>
             <a:picLocks noChangeAspect="1"/>
           </p:cNvPicPr>
@@ -6447,7 +6447,7 @@
                 </a:solidFill>
                 <a:latin typeface="Calibri"/>
               </a:rPr>
-              <a:t>2. Прямая генерация: «зелёная щель», ≤ 0,18 Вт; нужны киловатты</a:t>
+              <a:t>2. Прямая генерация: проблема зелёного диапазона, ≤ 0,18 Вт; нужны киловатты</a:t>
             </a:r>
           </a:p>
           <a:p>
@@ -6502,7 +6502,7 @@
       </p:sp>
       <p:pic>
         <p:nvPicPr>
-          <p:cNvPr id="5" name="Picture 4" descr="pic_95388.png"/>
+          <p:cNvPr id="5" name="Picture 4" descr="pic_9253.png"/>
           <p:cNvPicPr>
             <a:picLocks noChangeAspect="1"/>
           </p:cNvPicPr>
@@ -6678,7 +6678,7 @@
                 </a:solidFill>
                 <a:latin typeface="Calibri"/>
               </a:rPr>
-              <a:t>Прямая генерация ограничена «зелёной щелью» InGaN</a:t>
+              <a:t>Прямая генерация ограничена «проблемой зелёного диапазона» InGaN</a:t>
             </a:r>
           </a:p>
           <a:p>

--- a/Лекция_4доп_Генерация_зелёного_излучения.pptx
+++ b/Лекция_4доп_Генерация_зелёного_излучения.pptx
@@ -3966,7 +3966,7 @@
       </p:graphicFrame>
       <p:pic>
         <p:nvPicPr>
-          <p:cNvPr id="6" name="Picture 5" descr="pic_89419.png"/>
+          <p:cNvPr id="6" name="Picture 5" descr="pic_159.png"/>
           <p:cNvPicPr>
             <a:picLocks noChangeAspect="1"/>
           </p:cNvPicPr>
@@ -4231,7 +4231,7 @@
       </p:sp>
       <p:pic>
         <p:nvPicPr>
-          <p:cNvPr id="5" name="Picture 4" descr="pic_36289.png"/>
+          <p:cNvPr id="5" name="Picture 4" descr="pic_63735.png"/>
           <p:cNvPicPr>
             <a:picLocks noChangeAspect="1"/>
           </p:cNvPicPr>
@@ -4255,7 +4255,7 @@
       </p:pic>
       <p:pic>
         <p:nvPicPr>
-          <p:cNvPr id="6" name="Picture 5" descr="pic_24718.png"/>
+          <p:cNvPr id="6" name="Picture 5" descr="pic_81285.png"/>
           <p:cNvPicPr>
             <a:picLocks noChangeAspect="1"/>
           </p:cNvPicPr>
@@ -5924,7 +5924,7 @@
       </p:graphicFrame>
       <p:pic>
         <p:nvPicPr>
-          <p:cNvPr id="6" name="Picture 5" descr="pic_93475.png"/>
+          <p:cNvPr id="6" name="Picture 5" descr="pic_70762.png"/>
           <p:cNvPicPr>
             <a:picLocks noChangeAspect="1"/>
           </p:cNvPicPr>
@@ -6223,7 +6223,7 @@
       </p:sp>
       <p:pic>
         <p:nvPicPr>
-          <p:cNvPr id="5" name="Picture 4" descr="pic_55163.png"/>
+          <p:cNvPr id="5" name="Picture 4" descr="pic_90514.png"/>
           <p:cNvPicPr>
             <a:picLocks noChangeAspect="1"/>
           </p:cNvPicPr>
@@ -6247,7 +6247,7 @@
       </p:pic>
       <p:pic>
         <p:nvPicPr>
-          <p:cNvPr id="6" name="Picture 5" descr="pic_61940.png"/>
+          <p:cNvPr id="6" name="Picture 5" descr="pic_36886.png"/>
           <p:cNvPicPr>
             <a:picLocks noChangeAspect="1"/>
           </p:cNvPicPr>
@@ -6271,7 +6271,7 @@
       </p:pic>
       <p:pic>
         <p:nvPicPr>
-          <p:cNvPr id="7" name="Picture 6" descr="pic_20789.png"/>
+          <p:cNvPr id="7" name="Picture 6" descr="pic_38050.png"/>
           <p:cNvPicPr>
             <a:picLocks noChangeAspect="1"/>
           </p:cNvPicPr>
@@ -6502,7 +6502,7 @@
       </p:sp>
       <p:pic>
         <p:nvPicPr>
-          <p:cNvPr id="5" name="Picture 4" descr="pic_9253.png"/>
+          <p:cNvPr id="5" name="Picture 4" descr="pic_80204.png"/>
           <p:cNvPicPr>
             <a:picLocks noChangeAspect="1"/>
           </p:cNvPicPr>

--- a/Лекция_4доп_Генерация_зелёного_излучения.pptx
+++ b/Лекция_4доп_Генерация_зелёного_излучения.pptx
@@ -3966,7 +3966,7 @@
       </p:graphicFrame>
       <p:pic>
         <p:nvPicPr>
-          <p:cNvPr id="6" name="Picture 5" descr="pic_159.png"/>
+          <p:cNvPr id="6" name="Picture 5" descr="pic_8532.png"/>
           <p:cNvPicPr>
             <a:picLocks noChangeAspect="1"/>
           </p:cNvPicPr>
@@ -4231,7 +4231,7 @@
       </p:sp>
       <p:pic>
         <p:nvPicPr>
-          <p:cNvPr id="5" name="Picture 4" descr="pic_63735.png"/>
+          <p:cNvPr id="5" name="Picture 4" descr="pic_89733.png"/>
           <p:cNvPicPr>
             <a:picLocks noChangeAspect="1"/>
           </p:cNvPicPr>
@@ -4255,7 +4255,7 @@
       </p:pic>
       <p:pic>
         <p:nvPicPr>
-          <p:cNvPr id="6" name="Picture 5" descr="pic_81285.png"/>
+          <p:cNvPr id="6" name="Picture 5" descr="pic_71273.png"/>
           <p:cNvPicPr>
             <a:picLocks noChangeAspect="1"/>
           </p:cNvPicPr>
@@ -5924,7 +5924,7 @@
       </p:graphicFrame>
       <p:pic>
         <p:nvPicPr>
-          <p:cNvPr id="6" name="Picture 5" descr="pic_70762.png"/>
+          <p:cNvPr id="6" name="Picture 5" descr="pic_25.png"/>
           <p:cNvPicPr>
             <a:picLocks noChangeAspect="1"/>
           </p:cNvPicPr>
@@ -6223,7 +6223,7 @@
       </p:sp>
       <p:pic>
         <p:nvPicPr>
-          <p:cNvPr id="5" name="Picture 4" descr="pic_90514.png"/>
+          <p:cNvPr id="5" name="Picture 4" descr="pic_45056.png"/>
           <p:cNvPicPr>
             <a:picLocks noChangeAspect="1"/>
           </p:cNvPicPr>
@@ -6247,7 +6247,7 @@
       </p:pic>
       <p:pic>
         <p:nvPicPr>
-          <p:cNvPr id="6" name="Picture 5" descr="pic_36886.png"/>
+          <p:cNvPr id="6" name="Picture 5" descr="pic_47035.png"/>
           <p:cNvPicPr>
             <a:picLocks noChangeAspect="1"/>
           </p:cNvPicPr>
@@ -6271,7 +6271,7 @@
       </p:pic>
       <p:pic>
         <p:nvPicPr>
-          <p:cNvPr id="7" name="Picture 6" descr="pic_38050.png"/>
+          <p:cNvPr id="7" name="Picture 6" descr="pic_36753.png"/>
           <p:cNvPicPr>
             <a:picLocks noChangeAspect="1"/>
           </p:cNvPicPr>
@@ -6502,7 +6502,7 @@
       </p:sp>
       <p:pic>
         <p:nvPicPr>
-          <p:cNvPr id="5" name="Picture 4" descr="pic_80204.png"/>
+          <p:cNvPr id="5" name="Picture 4" descr="pic_57112.png"/>
           <p:cNvPicPr>
             <a:picLocks noChangeAspect="1"/>
           </p:cNvPicPr>
@@ -6727,29 +6727,6 @@
                 <a:latin typeface="Calibri"/>
               </a:rPr>
               <a:t>Итог: доступные зелёные лазеры (535 нм) для аддитивных технологий</a:t>
-            </a:r>
-          </a:p>
-          <a:p>
-            <a:pPr>
-              <a:spcAft>
-                <a:spcPts val="1400"/>
-              </a:spcAft>
-            </a:pPr>
-          </a:p>
-          <a:p>
-            <a:pPr>
-              <a:spcAft>
-                <a:spcPts val="1400"/>
-              </a:spcAft>
-            </a:pPr>
-            <a:r>
-              <a:rPr sz="1800" b="0">
-                <a:solidFill>
-                  <a:srgbClr val="EEEEEE"/>
-                </a:solidFill>
-                <a:latin typeface="Calibri"/>
-              </a:rPr>
-              <a:t>Спасибо за внимание. Готов ответить на вопросы.</a:t>
             </a:r>
           </a:p>
         </p:txBody>
